--- a/week3/data-structure/data-structure-basic.pptx
+++ b/week3/data-structure/data-structure-basic.pptx
@@ -11673,14 +11673,14 @@
             <a:r>
               <a:rPr lang="en-US" altLang="ko-KR" sz="1100" b="1" dirty="0">
                 <a:solidFill>
-                  <a:srgbClr val="6D92AB"/>
-                </a:solidFill>
-              </a:rPr>
-              <a:t>1</a:t>
+                  <a:sysClr val="windowText" lastClr="000000"/>
+                </a:solidFill>
+              </a:rPr>
+              <a:t>0x1000</a:t>
             </a:r>
             <a:endParaRPr lang="ko-KR" altLang="en-US" sz="1100" b="1" dirty="0">
               <a:solidFill>
-                <a:srgbClr val="6D92AB"/>
+                <a:sysClr val="windowText" lastClr="000000"/>
               </a:solidFill>
             </a:endParaRPr>
           </a:p>
